--- a/Cource_LAB_AWS_3_AWS-cloud-platform.pptx
+++ b/Cource_LAB_AWS_3_AWS-cloud-platform.pptx
@@ -6190,7 +6190,7 @@
           <a:p>
             <a:fld id="{7A02337E-4703-49AB-8D81-EA2F8A6577FC}" type="datetimeFigureOut">
               <a:rPr lang="en-US" smtClean="0"/>
-              <a:t>10/7/2025</a:t>
+              <a:t>9/18/2026</a:t>
             </a:fld>
             <a:endParaRPr lang="en-US"/>
           </a:p>
@@ -6361,7 +6361,7 @@
           <a:p>
             <a:fld id="{7A02337E-4703-49AB-8D81-EA2F8A6577FC}" type="datetimeFigureOut">
               <a:rPr lang="en-US" smtClean="0"/>
-              <a:t>10/7/2025</a:t>
+              <a:t>9/18/2026</a:t>
             </a:fld>
             <a:endParaRPr lang="en-US"/>
           </a:p>
@@ -6542,7 +6542,7 @@
           <a:p>
             <a:fld id="{7A02337E-4703-49AB-8D81-EA2F8A6577FC}" type="datetimeFigureOut">
               <a:rPr lang="en-US" smtClean="0"/>
-              <a:t>10/7/2025</a:t>
+              <a:t>9/18/2026</a:t>
             </a:fld>
             <a:endParaRPr lang="en-US"/>
           </a:p>
@@ -6713,7 +6713,7 @@
           <a:p>
             <a:fld id="{48A87A34-81AB-432B-8DAE-1953F412C126}" type="datetimeFigureOut">
               <a:rPr lang="en-US" smtClean="0"/>
-              <a:t>10/7/2025</a:t>
+              <a:t>9/18/2026</a:t>
             </a:fld>
             <a:endParaRPr lang="en-US" dirty="0"/>
           </a:p>
@@ -6959,7 +6959,7 @@
           <a:p>
             <a:fld id="{7A02337E-4703-49AB-8D81-EA2F8A6577FC}" type="datetimeFigureOut">
               <a:rPr lang="en-US" smtClean="0"/>
-              <a:t>10/7/2025</a:t>
+              <a:t>9/18/2026</a:t>
             </a:fld>
             <a:endParaRPr lang="en-US"/>
           </a:p>
@@ -7192,7 +7192,7 @@
           <a:p>
             <a:fld id="{7A02337E-4703-49AB-8D81-EA2F8A6577FC}" type="datetimeFigureOut">
               <a:rPr lang="en-US" smtClean="0"/>
-              <a:t>10/7/2025</a:t>
+              <a:t>9/18/2026</a:t>
             </a:fld>
             <a:endParaRPr lang="en-US"/>
           </a:p>
@@ -7560,7 +7560,7 @@
           <a:p>
             <a:fld id="{7A02337E-4703-49AB-8D81-EA2F8A6577FC}" type="datetimeFigureOut">
               <a:rPr lang="en-US" smtClean="0"/>
-              <a:t>10/7/2025</a:t>
+              <a:t>9/18/2026</a:t>
             </a:fld>
             <a:endParaRPr lang="en-US"/>
           </a:p>
@@ -7679,7 +7679,7 @@
           <a:p>
             <a:fld id="{7A02337E-4703-49AB-8D81-EA2F8A6577FC}" type="datetimeFigureOut">
               <a:rPr lang="en-US" smtClean="0"/>
-              <a:t>10/7/2025</a:t>
+              <a:t>9/18/2026</a:t>
             </a:fld>
             <a:endParaRPr lang="en-US"/>
           </a:p>
@@ -7775,7 +7775,7 @@
           <a:p>
             <a:fld id="{7A02337E-4703-49AB-8D81-EA2F8A6577FC}" type="datetimeFigureOut">
               <a:rPr lang="en-US" smtClean="0"/>
-              <a:t>10/7/2025</a:t>
+              <a:t>9/18/2026</a:t>
             </a:fld>
             <a:endParaRPr lang="en-US"/>
           </a:p>
@@ -8053,7 +8053,7 @@
           <a:p>
             <a:fld id="{7A02337E-4703-49AB-8D81-EA2F8A6577FC}" type="datetimeFigureOut">
               <a:rPr lang="en-US" smtClean="0"/>
-              <a:t>10/7/2025</a:t>
+              <a:t>9/18/2026</a:t>
             </a:fld>
             <a:endParaRPr lang="en-US"/>
           </a:p>
@@ -8307,7 +8307,7 @@
           <a:p>
             <a:fld id="{7A02337E-4703-49AB-8D81-EA2F8A6577FC}" type="datetimeFigureOut">
               <a:rPr lang="en-US" smtClean="0"/>
-              <a:t>10/7/2025</a:t>
+              <a:t>9/18/2026</a:t>
             </a:fld>
             <a:endParaRPr lang="en-US"/>
           </a:p>
@@ -8521,7 +8521,7 @@
           <a:p>
             <a:fld id="{7A02337E-4703-49AB-8D81-EA2F8A6577FC}" type="datetimeFigureOut">
               <a:rPr lang="en-US" smtClean="0"/>
-              <a:t>10/7/2025</a:t>
+              <a:t>9/18/2026</a:t>
             </a:fld>
             <a:endParaRPr lang="en-US"/>
           </a:p>
@@ -10300,90 +10300,6 @@
           </p:txBody>
         </p:sp>
       </p:grpSp>
-      <p:sp>
-        <p:nvSpPr>
-          <p:cNvPr id="22" name="Rectangle 21"/>
-          <p:cNvSpPr/>
-          <p:nvPr/>
-        </p:nvSpPr>
-        <p:spPr>
-          <a:xfrm>
-            <a:off x="6683644" y="4335788"/>
-            <a:ext cx="2613761" cy="230832"/>
-          </a:xfrm>
-          <a:prstGeom prst="rect">
-            <a:avLst/>
-          </a:prstGeom>
-        </p:spPr>
-        <p:txBody>
-          <a:bodyPr wrap="square">
-            <a:spAutoFit/>
-          </a:bodyPr>
-          <a:lstStyle/>
-          <a:p>
-            <a:r>
-              <a:rPr lang="en-US" sz="900" dirty="0"/>
-              <a:t>https://www.youtube.com/@AmelOline/videos</a:t>
-            </a:r>
-          </a:p>
-        </p:txBody>
-      </p:sp>
-      <p:sp>
-        <p:nvSpPr>
-          <p:cNvPr id="23" name="Rectangle 22"/>
-          <p:cNvSpPr/>
-          <p:nvPr/>
-        </p:nvSpPr>
-        <p:spPr>
-          <a:xfrm>
-            <a:off x="7520552" y="4197289"/>
-            <a:ext cx="1623448" cy="230832"/>
-          </a:xfrm>
-          <a:prstGeom prst="rect">
-            <a:avLst/>
-          </a:prstGeom>
-        </p:spPr>
-        <p:txBody>
-          <a:bodyPr wrap="square">
-            <a:spAutoFit/>
-          </a:bodyPr>
-          <a:lstStyle/>
-          <a:p>
-            <a:r>
-              <a:rPr lang="en-US" sz="900" dirty="0"/>
-              <a:t>https://github.com/siagianp</a:t>
-            </a:r>
-          </a:p>
-        </p:txBody>
-      </p:sp>
-      <p:sp>
-        <p:nvSpPr>
-          <p:cNvPr id="2" name="Rectangle 1"/>
-          <p:cNvSpPr/>
-          <p:nvPr/>
-        </p:nvSpPr>
-        <p:spPr>
-          <a:xfrm>
-            <a:off x="5707251" y="4474288"/>
-            <a:ext cx="3667194" cy="230832"/>
-          </a:xfrm>
-          <a:prstGeom prst="rect">
-            <a:avLst/>
-          </a:prstGeom>
-        </p:spPr>
-        <p:txBody>
-          <a:bodyPr wrap="square">
-            <a:spAutoFit/>
-          </a:bodyPr>
-          <a:lstStyle/>
-          <a:p>
-            <a:r>
-              <a:rPr lang="en-US" sz="900" dirty="0"/>
-              <a:t>https://github.com/amelcharolinesgn2/IoT_simulator-mqtt-NodeRed</a:t>
-            </a:r>
-          </a:p>
-        </p:txBody>
-      </p:sp>
       <p:pic>
         <p:nvPicPr>
           <p:cNvPr id="4" name="Picture 3"/>
@@ -10714,57 +10630,431 @@
       </p:sp>
       <p:sp>
         <p:nvSpPr>
-          <p:cNvPr id="3" name="Rectangle 2"/>
+          <p:cNvPr id="24" name="Rectangle 23"/>
           <p:cNvSpPr/>
           <p:nvPr/>
         </p:nvSpPr>
         <p:spPr>
           <a:xfrm>
-            <a:off x="6152941" y="4612787"/>
-            <a:ext cx="3204723" cy="230832"/>
+            <a:off x="6395379" y="4488102"/>
+            <a:ext cx="2218246" cy="169277"/>
           </a:xfrm>
           <a:prstGeom prst="rect">
             <a:avLst/>
           </a:prstGeom>
         </p:spPr>
         <p:txBody>
-          <a:bodyPr wrap="none">
+          <a:bodyPr wrap="square">
             <a:spAutoFit/>
           </a:bodyPr>
           <a:lstStyle/>
           <a:p>
             <a:r>
-              <a:rPr lang="en-US" sz="900" dirty="0"/>
-              <a:t>https://github.com/amelcharolinesgn2/Cloud-Infrastructures</a:t>
-            </a:r>
-          </a:p>
-        </p:txBody>
-      </p:sp>
-      <p:sp>
-        <p:nvSpPr>
-          <p:cNvPr id="24" name="Rectangle 23"/>
+              <a:rPr lang="en-US" sz="500" dirty="0"/>
+              <a:t>https</a:t>
+            </a:r>
+            <a:r>
+              <a:rPr lang="en-US" sz="500" dirty="0" smtClean="0"/>
+              <a:t>://github.com/amelcharolinesgn2/IoT_simulator-mqtt-NodeRed</a:t>
+            </a:r>
+            <a:endParaRPr lang="en-US" sz="500" dirty="0"/>
+          </a:p>
+        </p:txBody>
+      </p:sp>
+      <p:sp>
+        <p:nvSpPr>
+          <p:cNvPr id="33" name="Rectangle 32"/>
           <p:cNvSpPr/>
           <p:nvPr/>
         </p:nvSpPr>
         <p:spPr>
           <a:xfrm>
-            <a:off x="5620344" y="4785911"/>
-            <a:ext cx="3839513" cy="230832"/>
+            <a:off x="7061962" y="3853188"/>
+            <a:ext cx="1301349" cy="150490"/>
           </a:xfrm>
           <a:prstGeom prst="rect">
             <a:avLst/>
           </a:prstGeom>
         </p:spPr>
         <p:txBody>
+          <a:bodyPr wrap="square">
+            <a:spAutoFit/>
+          </a:bodyPr>
+          <a:lstStyle/>
+          <a:p>
+            <a:pPr algn="r"/>
+            <a:r>
+              <a:rPr lang="en-US" sz="378" dirty="0"/>
+              <a:t>https://www.youtube.com/@AmelOline/videos</a:t>
+            </a:r>
+          </a:p>
+        </p:txBody>
+      </p:sp>
+      <p:sp>
+        <p:nvSpPr>
+          <p:cNvPr id="34" name="Rectangle 33"/>
+          <p:cNvSpPr/>
+          <p:nvPr/>
+        </p:nvSpPr>
+        <p:spPr>
+          <a:xfrm>
+            <a:off x="7474533" y="3790888"/>
+            <a:ext cx="879077" cy="150490"/>
+          </a:xfrm>
+          <a:prstGeom prst="rect">
+            <a:avLst/>
+          </a:prstGeom>
+        </p:spPr>
+        <p:txBody>
+          <a:bodyPr wrap="square">
+            <a:spAutoFit/>
+          </a:bodyPr>
+          <a:lstStyle/>
+          <a:p>
+            <a:pPr algn="r"/>
+            <a:r>
+              <a:rPr lang="en-US" sz="378" dirty="0"/>
+              <a:t>https://github.com/siagianp</a:t>
+            </a:r>
+          </a:p>
+        </p:txBody>
+      </p:sp>
+      <p:sp>
+        <p:nvSpPr>
+          <p:cNvPr id="35" name="Rectangle 34"/>
+          <p:cNvSpPr/>
+          <p:nvPr/>
+        </p:nvSpPr>
+        <p:spPr>
+          <a:xfrm>
+            <a:off x="6911230" y="3924787"/>
+            <a:ext cx="1452642" cy="150490"/>
+          </a:xfrm>
+          <a:prstGeom prst="rect">
+            <a:avLst/>
+          </a:prstGeom>
+        </p:spPr>
+        <p:txBody>
           <a:bodyPr wrap="none">
             <a:spAutoFit/>
           </a:bodyPr>
           <a:lstStyle/>
           <a:p>
-            <a:r>
-              <a:rPr lang="en-US" sz="900" dirty="0"/>
+            <a:pPr algn="r"/>
+            <a:r>
+              <a:rPr lang="en-US" sz="378" dirty="0"/>
+              <a:t>https://github.com/amelcharolinesgn2/Cloud-Infrastructures</a:t>
+            </a:r>
+          </a:p>
+        </p:txBody>
+      </p:sp>
+      <p:sp>
+        <p:nvSpPr>
+          <p:cNvPr id="36" name="Rectangle 35"/>
+          <p:cNvSpPr/>
+          <p:nvPr/>
+        </p:nvSpPr>
+        <p:spPr>
+          <a:xfrm>
+            <a:off x="6645132" y="3988813"/>
+            <a:ext cx="1718740" cy="150490"/>
+          </a:xfrm>
+          <a:prstGeom prst="rect">
+            <a:avLst/>
+          </a:prstGeom>
+        </p:spPr>
+        <p:txBody>
+          <a:bodyPr wrap="none">
+            <a:spAutoFit/>
+          </a:bodyPr>
+          <a:lstStyle/>
+          <a:p>
+            <a:pPr algn="r"/>
+            <a:r>
+              <a:rPr lang="en-US" sz="378" dirty="0"/>
               <a:t>https://github.com/amelcharolinesgn2/ClouD-Infrastructure-SISKA-2025</a:t>
             </a:r>
+          </a:p>
+        </p:txBody>
+      </p:sp>
+      <p:sp>
+        <p:nvSpPr>
+          <p:cNvPr id="37" name="Rectangle 36"/>
+          <p:cNvSpPr/>
+          <p:nvPr/>
+        </p:nvSpPr>
+        <p:spPr>
+          <a:xfrm>
+            <a:off x="7061962" y="4039756"/>
+            <a:ext cx="1301349" cy="150490"/>
+          </a:xfrm>
+          <a:prstGeom prst="rect">
+            <a:avLst/>
+          </a:prstGeom>
+        </p:spPr>
+        <p:txBody>
+          <a:bodyPr wrap="square">
+            <a:spAutoFit/>
+          </a:bodyPr>
+          <a:lstStyle/>
+          <a:p>
+            <a:pPr algn="r"/>
+            <a:r>
+              <a:rPr lang="en-US" sz="378" dirty="0"/>
+              <a:t>https://</a:t>
+            </a:r>
+            <a:r>
+              <a:rPr lang="en-US" sz="378" dirty="0" smtClean="0"/>
+              <a:t>github.com/amelcharolinesgn2/CCNA-1-v7</a:t>
+            </a:r>
+            <a:endParaRPr lang="en-US" sz="378" dirty="0"/>
+          </a:p>
+        </p:txBody>
+      </p:sp>
+      <p:sp>
+        <p:nvSpPr>
+          <p:cNvPr id="38" name="Rectangle 37"/>
+          <p:cNvSpPr/>
+          <p:nvPr/>
+        </p:nvSpPr>
+        <p:spPr>
+          <a:xfrm>
+            <a:off x="7061962" y="4101436"/>
+            <a:ext cx="1301349" cy="150490"/>
+          </a:xfrm>
+          <a:prstGeom prst="rect">
+            <a:avLst/>
+          </a:prstGeom>
+        </p:spPr>
+        <p:txBody>
+          <a:bodyPr wrap="square">
+            <a:spAutoFit/>
+          </a:bodyPr>
+          <a:lstStyle/>
+          <a:p>
+            <a:pPr algn="r"/>
+            <a:r>
+              <a:rPr lang="en-US" sz="378" dirty="0"/>
+              <a:t>https://</a:t>
+            </a:r>
+            <a:r>
+              <a:rPr lang="en-US" sz="378" dirty="0" smtClean="0"/>
+              <a:t>github.com/amelcharolinesgn2/CCNA-2-v7</a:t>
+            </a:r>
+            <a:endParaRPr lang="en-US" sz="378" dirty="0"/>
+          </a:p>
+        </p:txBody>
+      </p:sp>
+      <p:sp>
+        <p:nvSpPr>
+          <p:cNvPr id="39" name="Rectangle 38"/>
+          <p:cNvSpPr/>
+          <p:nvPr/>
+        </p:nvSpPr>
+        <p:spPr>
+          <a:xfrm>
+            <a:off x="7063084" y="4357324"/>
+            <a:ext cx="1301349" cy="208647"/>
+          </a:xfrm>
+          <a:prstGeom prst="rect">
+            <a:avLst/>
+          </a:prstGeom>
+        </p:spPr>
+        <p:txBody>
+          <a:bodyPr wrap="square">
+            <a:spAutoFit/>
+          </a:bodyPr>
+          <a:lstStyle/>
+          <a:p>
+            <a:pPr algn="r"/>
+            <a:r>
+              <a:rPr lang="en-US" sz="378" dirty="0">
+                <a:hlinkClick r:id="rId8"/>
+              </a:rPr>
+              <a:t>https://github.com/amelcharolinesgn2/AWS</a:t>
+            </a:r>
+            <a:r>
+              <a:rPr lang="en-US" sz="378" dirty="0"/>
+              <a:t> Certificate</a:t>
+            </a:r>
+          </a:p>
+        </p:txBody>
+      </p:sp>
+      <p:sp>
+        <p:nvSpPr>
+          <p:cNvPr id="40" name="Rectangle 39"/>
+          <p:cNvSpPr/>
+          <p:nvPr/>
+        </p:nvSpPr>
+        <p:spPr>
+          <a:xfrm>
+            <a:off x="7063084" y="4415481"/>
+            <a:ext cx="1301349" cy="150490"/>
+          </a:xfrm>
+          <a:prstGeom prst="rect">
+            <a:avLst/>
+          </a:prstGeom>
+        </p:spPr>
+        <p:txBody>
+          <a:bodyPr wrap="square">
+            <a:spAutoFit/>
+          </a:bodyPr>
+          <a:lstStyle/>
+          <a:p>
+            <a:pPr algn="r"/>
+            <a:r>
+              <a:rPr lang="en-US" sz="378" dirty="0">
+                <a:hlinkClick r:id="rId8"/>
+              </a:rPr>
+              <a:t>https://</a:t>
+            </a:r>
+            <a:r>
+              <a:rPr lang="en-US" sz="378" dirty="0" smtClean="0">
+                <a:hlinkClick r:id="rId8"/>
+              </a:rPr>
+              <a:t>github.com/amelcharolinesgn2/OpenStack</a:t>
+            </a:r>
+            <a:endParaRPr lang="en-US" sz="378" dirty="0"/>
+          </a:p>
+        </p:txBody>
+      </p:sp>
+      <p:sp>
+        <p:nvSpPr>
+          <p:cNvPr id="41" name="Rectangle 40"/>
+          <p:cNvSpPr/>
+          <p:nvPr/>
+        </p:nvSpPr>
+        <p:spPr>
+          <a:xfrm>
+            <a:off x="7062523" y="4298795"/>
+            <a:ext cx="1301349" cy="150490"/>
+          </a:xfrm>
+          <a:prstGeom prst="rect">
+            <a:avLst/>
+          </a:prstGeom>
+        </p:spPr>
+        <p:txBody>
+          <a:bodyPr wrap="square">
+            <a:spAutoFit/>
+          </a:bodyPr>
+          <a:lstStyle/>
+          <a:p>
+            <a:pPr algn="r"/>
+            <a:r>
+              <a:rPr lang="en-US" sz="378" dirty="0">
+                <a:hlinkClick r:id="rId8"/>
+              </a:rPr>
+              <a:t>https://</a:t>
+            </a:r>
+            <a:r>
+              <a:rPr lang="en-US" sz="378" dirty="0" smtClean="0">
+                <a:hlinkClick r:id="rId8"/>
+              </a:rPr>
+              <a:t>github.com/amelcharolinesgn2/CloudSim</a:t>
+            </a:r>
+            <a:endParaRPr lang="en-US" sz="378" dirty="0"/>
+          </a:p>
+        </p:txBody>
+      </p:sp>
+      <p:sp>
+        <p:nvSpPr>
+          <p:cNvPr id="42" name="Rectangle 41"/>
+          <p:cNvSpPr/>
+          <p:nvPr/>
+        </p:nvSpPr>
+        <p:spPr>
+          <a:xfrm>
+            <a:off x="7061401" y="4161546"/>
+            <a:ext cx="1301349" cy="150490"/>
+          </a:xfrm>
+          <a:prstGeom prst="rect">
+            <a:avLst/>
+          </a:prstGeom>
+        </p:spPr>
+        <p:txBody>
+          <a:bodyPr wrap="square">
+            <a:spAutoFit/>
+          </a:bodyPr>
+          <a:lstStyle/>
+          <a:p>
+            <a:pPr algn="r"/>
+            <a:r>
+              <a:rPr lang="en-US" sz="378" dirty="0"/>
+              <a:t>https://</a:t>
+            </a:r>
+            <a:r>
+              <a:rPr lang="en-US" sz="378" dirty="0" smtClean="0"/>
+              <a:t>github.com/amelcharolinesgn2/CCNA-3-v7</a:t>
+            </a:r>
+            <a:endParaRPr lang="en-US" sz="378" dirty="0"/>
+          </a:p>
+        </p:txBody>
+      </p:sp>
+      <p:sp>
+        <p:nvSpPr>
+          <p:cNvPr id="43" name="Rectangle 42"/>
+          <p:cNvSpPr/>
+          <p:nvPr/>
+        </p:nvSpPr>
+        <p:spPr>
+          <a:xfrm>
+            <a:off x="7061401" y="4210480"/>
+            <a:ext cx="1301349" cy="150490"/>
+          </a:xfrm>
+          <a:prstGeom prst="rect">
+            <a:avLst/>
+          </a:prstGeom>
+        </p:spPr>
+        <p:txBody>
+          <a:bodyPr wrap="square">
+            <a:spAutoFit/>
+          </a:bodyPr>
+          <a:lstStyle/>
+          <a:p>
+            <a:pPr algn="r"/>
+            <a:r>
+              <a:rPr lang="en-US" sz="378" dirty="0"/>
+              <a:t>https://</a:t>
+            </a:r>
+            <a:r>
+              <a:rPr lang="en-US" sz="378" dirty="0" smtClean="0"/>
+              <a:t>github.com/amelcharolinesgn2/CCNA-4-v7</a:t>
+            </a:r>
+            <a:endParaRPr lang="en-US" sz="378" dirty="0"/>
+          </a:p>
+        </p:txBody>
+      </p:sp>
+      <p:sp>
+        <p:nvSpPr>
+          <p:cNvPr id="44" name="Rectangle 43"/>
+          <p:cNvSpPr/>
+          <p:nvPr/>
+        </p:nvSpPr>
+        <p:spPr>
+          <a:xfrm>
+            <a:off x="6944720" y="4258221"/>
+            <a:ext cx="1408890" cy="150490"/>
+          </a:xfrm>
+          <a:prstGeom prst="rect">
+            <a:avLst/>
+          </a:prstGeom>
+        </p:spPr>
+        <p:txBody>
+          <a:bodyPr wrap="square">
+            <a:spAutoFit/>
+          </a:bodyPr>
+          <a:lstStyle/>
+          <a:p>
+            <a:pPr algn="r"/>
+            <a:r>
+              <a:rPr lang="en-US" sz="378" dirty="0"/>
+              <a:t>https://</a:t>
+            </a:r>
+            <a:r>
+              <a:rPr lang="en-US" sz="378" dirty="0" smtClean="0"/>
+              <a:t>github.com/amelcharolinesgn2/ANJAR_CCNP_Lab</a:t>
+            </a:r>
+            <a:endParaRPr lang="en-US" sz="378" dirty="0"/>
           </a:p>
         </p:txBody>
       </p:sp>
@@ -13084,6 +13374,174 @@
                 <a:srgbClr val="0070C0"/>
               </a:solidFill>
             </a:endParaRPr>
+          </a:p>
+        </p:txBody>
+      </p:sp>
+      <p:sp>
+        <p:nvSpPr>
+          <p:cNvPr id="5" name="Rectangle 4"/>
+          <p:cNvSpPr/>
+          <p:nvPr/>
+        </p:nvSpPr>
+        <p:spPr>
+          <a:xfrm>
+            <a:off x="5904883" y="3651941"/>
+            <a:ext cx="2613761" cy="230832"/>
+          </a:xfrm>
+          <a:prstGeom prst="rect">
+            <a:avLst/>
+          </a:prstGeom>
+        </p:spPr>
+        <p:txBody>
+          <a:bodyPr wrap="square">
+            <a:spAutoFit/>
+          </a:bodyPr>
+          <a:lstStyle/>
+          <a:p>
+            <a:r>
+              <a:rPr lang="en-US" sz="900" dirty="0"/>
+              <a:t>https://www.youtube.com/@AmelOline/videos</a:t>
+            </a:r>
+          </a:p>
+        </p:txBody>
+      </p:sp>
+      <p:sp>
+        <p:nvSpPr>
+          <p:cNvPr id="6" name="Rectangle 5"/>
+          <p:cNvSpPr/>
+          <p:nvPr/>
+        </p:nvSpPr>
+        <p:spPr>
+          <a:xfrm>
+            <a:off x="6741791" y="3513442"/>
+            <a:ext cx="1623448" cy="230832"/>
+          </a:xfrm>
+          <a:prstGeom prst="rect">
+            <a:avLst/>
+          </a:prstGeom>
+        </p:spPr>
+        <p:txBody>
+          <a:bodyPr wrap="square">
+            <a:spAutoFit/>
+          </a:bodyPr>
+          <a:lstStyle/>
+          <a:p>
+            <a:r>
+              <a:rPr lang="en-US" sz="900" dirty="0"/>
+              <a:t>https://github.com/siagianp</a:t>
+            </a:r>
+          </a:p>
+        </p:txBody>
+      </p:sp>
+      <p:sp>
+        <p:nvSpPr>
+          <p:cNvPr id="7" name="Rectangle 6"/>
+          <p:cNvSpPr/>
+          <p:nvPr/>
+        </p:nvSpPr>
+        <p:spPr>
+          <a:xfrm>
+            <a:off x="4928490" y="3790441"/>
+            <a:ext cx="3667194" cy="230832"/>
+          </a:xfrm>
+          <a:prstGeom prst="rect">
+            <a:avLst/>
+          </a:prstGeom>
+        </p:spPr>
+        <p:txBody>
+          <a:bodyPr wrap="square">
+            <a:spAutoFit/>
+          </a:bodyPr>
+          <a:lstStyle/>
+          <a:p>
+            <a:r>
+              <a:rPr lang="en-US" sz="900" dirty="0"/>
+              <a:t>https://github.com/amelcharolinesgn2/IoT_simulator-mqtt-NodeRed</a:t>
+            </a:r>
+          </a:p>
+        </p:txBody>
+      </p:sp>
+      <p:sp>
+        <p:nvSpPr>
+          <p:cNvPr id="8" name="Rectangle 7"/>
+          <p:cNvSpPr/>
+          <p:nvPr/>
+        </p:nvSpPr>
+        <p:spPr>
+          <a:xfrm>
+            <a:off x="5374180" y="3928940"/>
+            <a:ext cx="3204723" cy="230832"/>
+          </a:xfrm>
+          <a:prstGeom prst="rect">
+            <a:avLst/>
+          </a:prstGeom>
+        </p:spPr>
+        <p:txBody>
+          <a:bodyPr wrap="none">
+            <a:spAutoFit/>
+          </a:bodyPr>
+          <a:lstStyle/>
+          <a:p>
+            <a:r>
+              <a:rPr lang="en-US" sz="900" dirty="0"/>
+              <a:t>https://github.com/amelcharolinesgn2/Cloud-Infrastructures</a:t>
+            </a:r>
+          </a:p>
+        </p:txBody>
+      </p:sp>
+      <p:sp>
+        <p:nvSpPr>
+          <p:cNvPr id="9" name="Rectangle 8"/>
+          <p:cNvSpPr/>
+          <p:nvPr/>
+        </p:nvSpPr>
+        <p:spPr>
+          <a:xfrm>
+            <a:off x="4842330" y="4044356"/>
+            <a:ext cx="3839513" cy="230832"/>
+          </a:xfrm>
+          <a:prstGeom prst="rect">
+            <a:avLst/>
+          </a:prstGeom>
+        </p:spPr>
+        <p:txBody>
+          <a:bodyPr wrap="none">
+            <a:spAutoFit/>
+          </a:bodyPr>
+          <a:lstStyle/>
+          <a:p>
+            <a:r>
+              <a:rPr lang="en-US" sz="900" dirty="0"/>
+              <a:t>https://github.com/amelcharolinesgn2/ClouD-Infrastructure-SISKA-2025</a:t>
+            </a:r>
+          </a:p>
+        </p:txBody>
+      </p:sp>
+      <p:sp>
+        <p:nvSpPr>
+          <p:cNvPr id="10" name="Rectangle 9"/>
+          <p:cNvSpPr/>
+          <p:nvPr/>
+        </p:nvSpPr>
+        <p:spPr>
+          <a:xfrm>
+            <a:off x="4629273" y="4175207"/>
+            <a:ext cx="3966411" cy="230832"/>
+          </a:xfrm>
+          <a:prstGeom prst="rect">
+            <a:avLst/>
+          </a:prstGeom>
+        </p:spPr>
+        <p:txBody>
+          <a:bodyPr wrap="square">
+            <a:spAutoFit/>
+          </a:bodyPr>
+          <a:lstStyle/>
+          <a:p>
+            <a:r>
+              <a:rPr lang="en-US" sz="900" dirty="0"/>
+              <a:t>https://github.com/amelcharolinesgn2/Gyroscope-Sensor-Data-Accelerometer</a:t>
+            </a:r>
           </a:p>
         </p:txBody>
       </p:sp>
